--- a/public/fun/pack/pptx/reviewpro/보장점검양식프리미엄_30_사업장점검_임페리얼퍼플.pptx
+++ b/public/fun/pack/pptx/reviewpro/보장점검양식프리미엄_30_사업장점검_임페리얼퍼플.pptx
@@ -112,12 +112,12 @@
   <p:extLst>
     <p:ext uri="{521415D9-36F7-43E2-AB2F-B90AF26B5E84}">
       <p14:sectionLst xmlns:p14="http://schemas.microsoft.com/office/powerpoint/2010/main">
-        <p14:section name="시작" id="{98BCEE21-1204-4545-ABF8-F1AD506CA601}">
+        <p14:section name="시작" id="{9F29A722-EAF0-49DA-A384-49F01D9B9AB8}">
           <p14:sldIdLst>
             <p14:sldId id="256"/>
           </p14:sldIdLst>
         </p14:section>
-        <p14:section name="본문" id="{EB040536-5DA5-4434-9DE8-151D0ED5B871}">
+        <p14:section name="본문" id="{A534331E-7F52-4732-828F-FFA12DB3080D}">
           <p14:sldIdLst>
             <p14:sldId id="257"/>
             <p14:sldId id="258"/>
@@ -1556,7 +1556,7 @@
             </a:lvl1pPr>
           </a:lstStyle>
           <a:p>
-            <a:fld id="{AC3438E2-F7CE-4949-B3B6-BFE72FA46A40}" type="slidenum">
+            <a:fld id="{95A55C09-85BA-404B-BCDC-41646468B0E0}" type="slidenum">
               <a:rPr lang="en-US"/>
               <a:t>‹#›</a:t>
             </a:fld>
@@ -2176,7 +2176,7 @@
             </a:lvl1pPr>
           </a:lstStyle>
           <a:p>
-            <a:fld id="{ABFC8957-5CA1-48D2-9EE5-B45F5C46270C}" type="slidenum">
+            <a:fld id="{CB628EF2-8AFA-424F-BD61-E8A4C776EAEA}" type="slidenum">
               <a:rPr lang="en-US"/>
               <a:t>‹#›</a:t>
             </a:fld>
@@ -2797,7 +2797,7 @@
             </a:lvl1pPr>
           </a:lstStyle>
           <a:p>
-            <a:fld id="{D20F43EF-F83F-40B0-8EFD-0CB2A5B610F8}" type="slidenum">
+            <a:fld id="{CECFA06A-B167-42CF-80B1-2E2983B7F1EC}" type="slidenum">
               <a:rPr lang="en-US"/>
               <a:t>‹#›</a:t>
             </a:fld>
@@ -3650,7 +3650,7 @@
           <a:p>
             <a:r>
               <a:rPr lang="ko-KR"/>
-              <a:t>사업장 점검 · 0000. 00. 00</a:t>
+              <a:t>사업장 점검 · 날짜 입력</a:t>
             </a:r>
           </a:p>
           <a:p>
@@ -3741,7 +3741,7 @@
           <a:bodyPr/>
           <a:lstStyle/>
           <a:p>
-            <a:fld id="{AA2682FB-FA11-4AB1-B623-78041AA470C2}" type="slidenum">
+            <a:fld id="{322A14C4-7CE1-4BC9-8637-8A98CD5F0E59}" type="slidenum">
               <a:rPr lang="en-US"/>
               <a:t>‹#›</a:t>
             </a:fld>
@@ -4257,7 +4257,7 @@
           <a:bodyPr/>
           <a:lstStyle/>
           <a:p>
-            <a:fld id="{7EC0F53B-0124-4749-96AC-F25926008720}" type="slidenum">
+            <a:fld id="{3E2B029E-458F-4586-9811-1892EC26FFC6}" type="slidenum">
               <a:rPr lang="en-US"/>
               <a:t>‹#›</a:t>
             </a:fld>
@@ -5763,7 +5763,7 @@
           <a:bodyPr/>
           <a:lstStyle/>
           <a:p>
-            <a:fld id="{B7B02828-A5E3-478C-84FE-475AC1B73D23}" type="slidenum">
+            <a:fld id="{002F5B75-0A67-4B83-B76C-AF68FFE4EA00}" type="slidenum">
               <a:rPr lang="en-US"/>
               <a:t>‹#›</a:t>
             </a:fld>
@@ -7313,7 +7313,7 @@
           <a:bodyPr/>
           <a:lstStyle/>
           <a:p>
-            <a:fld id="{264FE730-D5AA-49EF-B66C-455C99DB31EF}" type="slidenum">
+            <a:fld id="{2EE57912-A5CC-4D2F-8B12-8A1B7B2C85D8}" type="slidenum">
               <a:rPr lang="en-US"/>
               <a:t>‹#›</a:t>
             </a:fld>
@@ -8190,7 +8190,7 @@
           <a:bodyPr/>
           <a:lstStyle/>
           <a:p>
-            <a:fld id="{34F07AEF-2A7C-46E5-B45B-109DB9E245E7}" type="slidenum">
+            <a:fld id="{6B58E93F-7FFB-4F01-B6A8-42ECA657B497}" type="slidenum">
               <a:rPr lang="en-US"/>
               <a:t>‹#›</a:t>
             </a:fld>
